--- a/3.1 Hoofdstuk 1 - Markten/3.1.3 Paragraaf 3 - Toepassen/2. Leren/3.1.3 Toepassen – presentatie.pptx
+++ b/3.1 Hoofdstuk 1 - Markten/3.1.3 Paragraaf 3 - Toepassen/2. Leren/3.1.3 Toepassen – presentatie.pptx
@@ -1918,6 +1918,8 @@
               </a:rPr>
               <a:t>Een marktvorm herkennen vanuit een contextbeschrijving</a:t>
             </a:r>
+          </a:p>
+          <a:p>
             <a:pPr algn="l" marL="342900" indent="-342900">
               <a:lnSpc>
                 <a:spcPct val="150000"/>
@@ -1939,6 +1941,8 @@
               </a:rPr>
               <a:t>Uitleggen waarom landbouwaanbod binnen een seizoen inelastisch is</a:t>
             </a:r>
+          </a:p>
+          <a:p>
             <a:pPr algn="l" marL="342900" indent="-342900">
               <a:lnSpc>
                 <a:spcPct val="150000"/>
@@ -1960,6 +1964,8 @@
               </a:rPr>
               <a:t>Beargumenteren waarom de vraag naar voedsel prijsinelastisch is</a:t>
             </a:r>
+          </a:p>
+          <a:p>
             <a:pPr algn="l" marL="342900" indent="-342900">
               <a:lnSpc>
                 <a:spcPct val="150000"/>
@@ -1981,7 +1987,6 @@
               </a:rPr>
               <a:t>Grafisch laten zien hoe inelasticiteit leidt tot grote prijsschommelingen</a:t>
             </a:r>
-            <a:endParaRPr lang="en-US" sz="1500" dirty="0"/>
           </a:p>
         </p:txBody>
       </p:sp>
@@ -2077,6 +2082,10 @@
             </a:outerShdw>
           </a:effectLst>
         </p:spPr>
+        <p:txBody>
+          <a:bodyPr/>
+          <a:p/>
+        </p:txBody>
       </p:sp>
       <p:sp>
         <p:nvSpPr>
@@ -2097,6 +2106,10 @@
           </a:solidFill>
           <a:ln/>
         </p:spPr>
+        <p:txBody>
+          <a:bodyPr/>
+          <a:p/>
+        </p:txBody>
       </p:sp>
       <p:sp>
         <p:nvSpPr>
@@ -2243,6 +2256,10 @@
             </a:outerShdw>
           </a:effectLst>
         </p:spPr>
+        <p:txBody>
+          <a:bodyPr/>
+          <a:p/>
+        </p:txBody>
       </p:sp>
       <p:sp>
         <p:nvSpPr>
@@ -2263,6 +2280,10 @@
           </a:solidFill>
           <a:ln/>
         </p:spPr>
+        <p:txBody>
+          <a:bodyPr/>
+          <a:p/>
+        </p:txBody>
       </p:sp>
       <p:sp>
         <p:nvSpPr>
@@ -2409,6 +2430,10 @@
             </a:outerShdw>
           </a:effectLst>
         </p:spPr>
+        <p:txBody>
+          <a:bodyPr/>
+          <a:p/>
+        </p:txBody>
       </p:sp>
       <p:sp>
         <p:nvSpPr>
@@ -2429,6 +2454,10 @@
           </a:solidFill>
           <a:ln/>
         </p:spPr>
+        <p:txBody>
+          <a:bodyPr/>
+          <a:p/>
+        </p:txBody>
       </p:sp>
       <p:sp>
         <p:nvSpPr>
@@ -2575,6 +2604,10 @@
             </a:outerShdw>
           </a:effectLst>
         </p:spPr>
+        <p:txBody>
+          <a:bodyPr/>
+          <a:p/>
+        </p:txBody>
       </p:sp>
       <p:sp>
         <p:nvSpPr>
@@ -2595,6 +2628,10 @@
           </a:solidFill>
           <a:ln/>
         </p:spPr>
+        <p:txBody>
+          <a:bodyPr/>
+          <a:p/>
+        </p:txBody>
       </p:sp>
       <p:sp>
         <p:nvSpPr>
@@ -2844,6 +2881,10 @@
             </a:outerShdw>
           </a:effectLst>
         </p:spPr>
+        <p:txBody>
+          <a:bodyPr/>
+          <a:p/>
+        </p:txBody>
       </p:sp>
       <p:sp>
         <p:nvSpPr>
@@ -2864,6 +2905,10 @@
           </a:solidFill>
           <a:ln/>
         </p:spPr>
+        <p:txBody>
+          <a:bodyPr/>
+          <a:p/>
+        </p:txBody>
       </p:sp>
       <p:sp>
         <p:nvSpPr>
@@ -3011,6 +3056,10 @@
             </a:outerShdw>
           </a:effectLst>
         </p:spPr>
+        <p:txBody>
+          <a:bodyPr/>
+          <a:p/>
+        </p:txBody>
       </p:sp>
       <p:sp>
         <p:nvSpPr>
@@ -3031,6 +3080,10 @@
           </a:solidFill>
           <a:ln/>
         </p:spPr>
+        <p:txBody>
+          <a:bodyPr/>
+          <a:p/>
+        </p:txBody>
       </p:sp>
       <p:sp>
         <p:nvSpPr>
@@ -3171,6 +3224,10 @@
           </a:solidFill>
           <a:ln/>
         </p:spPr>
+        <p:txBody>
+          <a:bodyPr/>
+          <a:p/>
+        </p:txBody>
       </p:sp>
       <p:sp>
         <p:nvSpPr>
@@ -3191,6 +3248,10 @@
           </a:solidFill>
           <a:ln/>
         </p:spPr>
+        <p:txBody>
+          <a:bodyPr/>
+          <a:p/>
+        </p:txBody>
       </p:sp>
       <p:sp>
         <p:nvSpPr>
@@ -3323,6 +3384,10 @@
             </a:outerShdw>
           </a:effectLst>
         </p:spPr>
+        <p:txBody>
+          <a:bodyPr/>
+          <a:p/>
+        </p:txBody>
       </p:sp>
       <p:sp>
         <p:nvSpPr>
@@ -3343,6 +3408,10 @@
           </a:solidFill>
           <a:ln/>
         </p:spPr>
+        <p:txBody>
+          <a:bodyPr/>
+          <a:p/>
+        </p:txBody>
       </p:sp>
       <p:sp>
         <p:nvSpPr>
@@ -3453,6 +3522,10 @@
             </a:outerShdw>
           </a:effectLst>
         </p:spPr>
+        <p:txBody>
+          <a:bodyPr/>
+          <a:p/>
+        </p:txBody>
       </p:sp>
       <p:sp>
         <p:nvSpPr>
@@ -3473,6 +3546,10 @@
           </a:solidFill>
           <a:ln/>
         </p:spPr>
+        <p:txBody>
+          <a:bodyPr/>
+          <a:p/>
+        </p:txBody>
       </p:sp>
       <p:sp>
         <p:nvSpPr>
@@ -3720,6 +3797,10 @@
             </a:outerShdw>
           </a:effectLst>
         </p:spPr>
+        <p:txBody>
+          <a:bodyPr/>
+          <a:p/>
+        </p:txBody>
       </p:sp>
       <p:sp>
         <p:nvSpPr>
@@ -3740,6 +3821,10 @@
           </a:solidFill>
           <a:ln/>
         </p:spPr>
+        <p:txBody>
+          <a:bodyPr/>
+          <a:p/>
+        </p:txBody>
       </p:sp>
       <p:sp>
         <p:nvSpPr>
@@ -3850,6 +3935,10 @@
             </a:outerShdw>
           </a:effectLst>
         </p:spPr>
+        <p:txBody>
+          <a:bodyPr/>
+          <a:p/>
+        </p:txBody>
       </p:sp>
       <p:sp>
         <p:nvSpPr>
@@ -3870,6 +3959,10 @@
           </a:solidFill>
           <a:ln/>
         </p:spPr>
+        <p:txBody>
+          <a:bodyPr/>
+          <a:p/>
+        </p:txBody>
       </p:sp>
       <p:sp>
         <p:nvSpPr>
@@ -4117,6 +4210,10 @@
             </a:outerShdw>
           </a:effectLst>
         </p:spPr>
+        <p:txBody>
+          <a:bodyPr/>
+          <a:p/>
+        </p:txBody>
       </p:sp>
       <p:sp>
         <p:nvSpPr>
@@ -4137,6 +4234,10 @@
           </a:solidFill>
           <a:ln/>
         </p:spPr>
+        <p:txBody>
+          <a:bodyPr/>
+          <a:p/>
+        </p:txBody>
       </p:sp>
       <p:sp>
         <p:nvSpPr>
@@ -4367,6 +4468,10 @@
           </a:solidFill>
           <a:ln/>
         </p:spPr>
+        <p:txBody>
+          <a:bodyPr/>
+          <a:p/>
+        </p:txBody>
       </p:sp>
       <p:sp>
         <p:nvSpPr>
@@ -4552,6 +4657,8 @@
               </a:rPr>
               <a:t>Marktbegrippen: concreet/abstract, homogeen/heterogeen</a:t>
             </a:r>
+          </a:p>
+          <a:p>
             <a:pPr algn="l" marL="342900" indent="-342900">
               <a:lnSpc>
                 <a:spcPct val="160000"/>
@@ -4573,6 +4680,8 @@
               </a:rPr>
               <a:t>Vijf marktvormen en hun kenmerken</a:t>
             </a:r>
+          </a:p>
+          <a:p>
             <a:pPr algn="l" marL="342900" indent="-342900">
               <a:lnSpc>
                 <a:spcPct val="160000"/>
@@ -4594,6 +4703,8 @@
               </a:rPr>
               <a:t>Marktvorm herkennen vanuit context: stappenplan toepassen</a:t>
             </a:r>
+          </a:p>
+          <a:p>
             <a:pPr algn="l" marL="342900" indent="-342900">
               <a:lnSpc>
                 <a:spcPct val="160000"/>
@@ -4615,6 +4726,8 @@
               </a:rPr>
               <a:t>Prijselasticiteit: elastisch vs inelastisch</a:t>
             </a:r>
+          </a:p>
+          <a:p>
             <a:pPr algn="l" marL="342900" indent="-342900">
               <a:lnSpc>
                 <a:spcPct val="160000"/>
@@ -4636,6 +4749,8 @@
               </a:rPr>
               <a:t>Landbouw: aanbod én vraag zijn inelastisch</a:t>
             </a:r>
+          </a:p>
+          <a:p>
             <a:pPr algn="l" marL="342900" indent="-342900">
               <a:lnSpc>
                 <a:spcPct val="160000"/>
@@ -4657,7 +4772,6 @@
               </a:rPr>
               <a:t>Gevolg: oogstschommelingen → forse prijsbewegingen</a:t>
             </a:r>
-            <a:endParaRPr lang="en-US" sz="1500" dirty="0"/>
           </a:p>
         </p:txBody>
       </p:sp>
